--- a/data/employees/EMP092/AST-EMP092-01.pptx
+++ b/data/employees/EMP092/AST-EMP092-01.pptx
@@ -9,6 +9,7 @@
     <p:sldId id="257" r:id="rId8"/>
     <p:sldId id="258" r:id="rId9"/>
     <p:sldId id="259" r:id="rId10"/>
+    <p:sldId id="260" r:id="rId11"/>
   </p:sldIdLst>
   <p:sldSz cx="9144000" cy="6858000" type="screen4x3"/>
   <p:notesSz cx="6858000" cy="9144000"/>
@@ -3098,42 +3099,55 @@
             <a:spLocks noGrp="1"/>
           </p:cNvSpPr>
           <p:nvPr>
-            <p:ph type="ctrTitle"/>
-          </p:nvPr>
-        </p:nvSpPr>
-        <p:spPr/>
-        <p:txBody>
-          <a:bodyPr/>
-          <a:lstStyle/>
-          <a:p>
-            <a:r>
-              <a:t>Project update deck - EMP092</a:t>
-            </a:r>
-          </a:p>
-        </p:txBody>
-      </p:sp>
-      <p:sp>
-        <p:nvSpPr>
-          <p:cNvPr id="3" name="Subtitle 2"/>
-          <p:cNvSpPr>
-            <a:spLocks noGrp="1"/>
-          </p:cNvSpPr>
-          <p:nvPr>
-            <p:ph type="subTitle" idx="1"/>
-          </p:nvPr>
-        </p:nvSpPr>
-        <p:spPr/>
-        <p:txBody>
-          <a:bodyPr/>
-          <a:lstStyle/>
-          <a:p>
-            <a:r>
-              <a:t>Jordan Nguyen | Analyst | Finance</a:t>
-            </a:r>
-          </a:p>
-          <a:p>
-            <a:r>
-              <a:t>Prepared: 2025-04-04</a:t>
+            <p:ph type="title"/>
+          </p:nvPr>
+        </p:nvSpPr>
+        <p:spPr/>
+        <p:txBody>
+          <a:bodyPr/>
+          <a:lstStyle/>
+          <a:p>
+            <a:r>
+              <a:t>Ast Emp092 01 - EMP092</a:t>
+            </a:r>
+          </a:p>
+        </p:txBody>
+      </p:sp>
+      <p:sp>
+        <p:nvSpPr>
+          <p:cNvPr id="3" name="Content Placeholder 2"/>
+          <p:cNvSpPr>
+            <a:spLocks noGrp="1"/>
+          </p:cNvSpPr>
+          <p:nvPr>
+            <p:ph idx="1"/>
+          </p:nvPr>
+        </p:nvSpPr>
+        <p:spPr/>
+        <p:txBody>
+          <a:bodyPr/>
+          <a:lstStyle/>
+          <a:p>
+            <a:r>
+              <a:t>Slide 1: Executive Summary</a:t>
+            </a:r>
+          </a:p>
+          <a:p>
+            <a:pPr lvl="1"/>
+            <a:r>
+              <a:t>Section 1: Fabric semantic model planning. EMP092 contributes to ast emp092 01 through recurring collaboration, clear ownership boundaries, and measurable outcomes. The team captures decisions, open issues, and handoffs so that knowledge remains discoverable for future programs.</a:t>
+            </a:r>
+          </a:p>
+          <a:p>
+            <a:pPr lvl="1"/>
+            <a:r>
+              <a:t>Section 2: Department KPI performance. EMP092 contributes to ast emp092 01 through recurring collaboration, clear ownership boundaries, and measurable outcomes. The team captures decisions, open issues, and handoffs so that knowledge remains discoverable for future programs.</a:t>
+            </a:r>
+          </a:p>
+          <a:p>
+            <a:pPr lvl="1"/>
+            <a:r>
+              <a:t>Section 3: Knowledge transfer and onboarding. EMP092 contributes to ast emp092 01 through recurring collaboration, clear ownership boundaries, and measurable outcomes. The team captures decisions, open issues, and handoffs so that knowledge remains discoverable for future programs.</a:t>
             </a:r>
           </a:p>
         </p:txBody>
@@ -3172,7 +3186,7 @@
           <a:lstStyle/>
           <a:p>
             <a:r>
-              <a:t>Q2 Budget Variance Report</a:t>
+              <a:t>Ast Emp092 01 - EMP092</a:t>
             </a:r>
           </a:p>
         </p:txBody>
@@ -3193,17 +3207,25 @@
           <a:lstStyle/>
           <a:p>
             <a:r>
-              <a:t>Overview of Q2 Budget Variance Report for Finance department.</a:t>
-            </a:r>
-          </a:p>
-          <a:p>
-            <a:r>
-              <a:t>Responsible: Jordan Nguyen (Analyst)</a:t>
-            </a:r>
-          </a:p>
-          <a:p>
-            <a:r>
-              <a:t>Location: Bengaluru | Skills: Synapse, Power BI, TypeScript, Python</a:t>
+              <a:t>Slide 2: Executive Summary</a:t>
+            </a:r>
+          </a:p>
+          <a:p>
+            <a:pPr lvl="1"/>
+            <a:r>
+              <a:t>Section 1: Department KPI performance. EMP092 contributes to ast emp092 01 through recurring collaboration, clear ownership boundaries, and measurable outcomes. The team captures decisions, open issues, and handoffs so that knowledge remains discoverable for future programs.</a:t>
+            </a:r>
+          </a:p>
+          <a:p>
+            <a:pPr lvl="1"/>
+            <a:r>
+              <a:t>Section 2: Knowledge transfer and onboarding. EMP092 contributes to ast emp092 01 through recurring collaboration, clear ownership boundaries, and measurable outcomes. The team captures decisions, open issues, and handoffs so that knowledge remains discoverable for future programs.</a:t>
+            </a:r>
+          </a:p>
+          <a:p>
+            <a:pPr lvl="1"/>
+            <a:r>
+              <a:t>Section 3: Operational risk review. EMP092 contributes to ast emp092 01 through recurring collaboration, clear ownership boundaries, and measurable outcomes. The team captures decisions, open issues, and handoffs so that knowledge remains discoverable for future programs.</a:t>
             </a:r>
           </a:p>
         </p:txBody>
@@ -3242,7 +3264,7 @@
           <a:lstStyle/>
           <a:p>
             <a:r>
-              <a:t>CapEx vs OpEx Analysis</a:t>
+              <a:t>Ast Emp092 01 - EMP092</a:t>
             </a:r>
           </a:p>
         </p:txBody>
@@ -3263,17 +3285,25 @@
           <a:lstStyle/>
           <a:p>
             <a:r>
-              <a:t>Overview of CapEx vs OpEx Analysis for Finance department.</a:t>
-            </a:r>
-          </a:p>
-          <a:p>
-            <a:r>
-              <a:t>Responsible: Jordan Nguyen (Analyst)</a:t>
-            </a:r>
-          </a:p>
-          <a:p>
-            <a:r>
-              <a:t>Location: Bengaluru | Skills: Synapse, Power BI, TypeScript, Python</a:t>
+              <a:t>Slide 3: Executive Summary</a:t>
+            </a:r>
+          </a:p>
+          <a:p>
+            <a:pPr lvl="1"/>
+            <a:r>
+              <a:t>Section 1: Operational risk review. EMP092 contributes to ast emp092 01 through recurring collaboration, clear ownership boundaries, and measurable outcomes. The team captures decisions, open issues, and handoffs so that knowledge remains discoverable for future programs.</a:t>
+            </a:r>
+          </a:p>
+          <a:p>
+            <a:pPr lvl="1"/>
+            <a:r>
+              <a:t>Section 2: Automation backlog refinement. EMP092 contributes to ast emp092 01 through recurring collaboration, clear ownership boundaries, and measurable outcomes. The team captures decisions, open issues, and handoffs so that knowledge remains discoverable for future programs.</a:t>
+            </a:r>
+          </a:p>
+          <a:p>
+            <a:pPr lvl="1"/>
+            <a:r>
+              <a:t>Section 3: Operational risk review. EMP092 contributes to ast emp092 01 through recurring collaboration, clear ownership boundaries, and measurable outcomes. The team captures decisions, open issues, and handoffs so that knowledge remains discoverable for future programs.</a:t>
             </a:r>
           </a:p>
         </p:txBody>
@@ -3312,7 +3342,7 @@
           <a:lstStyle/>
           <a:p>
             <a:r>
-              <a:t>Forecast Accuracy Metrics</a:t>
+              <a:t>Ast Emp092 01 - EMP092</a:t>
             </a:r>
           </a:p>
         </p:txBody>
@@ -3333,17 +3363,103 @@
           <a:lstStyle/>
           <a:p>
             <a:r>
-              <a:t>Overview of Forecast Accuracy Metrics for Finance department.</a:t>
-            </a:r>
-          </a:p>
-          <a:p>
-            <a:r>
-              <a:t>Responsible: Jordan Nguyen (Analyst)</a:t>
-            </a:r>
-          </a:p>
-          <a:p>
-            <a:r>
-              <a:t>Location: Bengaluru | Skills: Synapse, Power BI, TypeScript, Python</a:t>
+              <a:t>Slide 4: Executive Summary</a:t>
+            </a:r>
+          </a:p>
+          <a:p>
+            <a:pPr lvl="1"/>
+            <a:r>
+              <a:t>Section 1: Customer escalation analysis. EMP092 contributes to ast emp092 01 through recurring collaboration, clear ownership boundaries, and measurable outcomes. The team captures decisions, open issues, and handoffs so that knowledge remains discoverable for future programs.</a:t>
+            </a:r>
+          </a:p>
+          <a:p>
+            <a:pPr lvl="1"/>
+            <a:r>
+              <a:t>Section 2: Automation backlog refinement. EMP092 contributes to ast emp092 01 through recurring collaboration, clear ownership boundaries, and measurable outcomes. The team captures decisions, open issues, and handoffs so that knowledge remains discoverable for future programs.</a:t>
+            </a:r>
+          </a:p>
+          <a:p>
+            <a:pPr lvl="1"/>
+            <a:r>
+              <a:t>Section 3: Data quality remediation. EMP092 contributes to ast emp092 01 through recurring collaboration, clear ownership boundaries, and measurable outcomes. The team captures decisions, open issues, and handoffs so that knowledge remains discoverable for future programs.</a:t>
+            </a:r>
+          </a:p>
+        </p:txBody>
+      </p:sp>
+    </p:spTree>
+  </p:cSld>
+  <p:clrMapOvr>
+    <a:masterClrMapping/>
+  </p:clrMapOvr>
+</p:sld>
+</file>
+
+<file path=ppt/slides/slide5.xml><?xml version="1.0" encoding="utf-8"?>
+<p:sld xmlns:a="http://schemas.openxmlformats.org/drawingml/2006/main" xmlns:p="http://schemas.openxmlformats.org/presentationml/2006/main" xmlns:r="http://schemas.openxmlformats.org/officeDocument/2006/relationships">
+  <p:cSld>
+    <p:spTree>
+      <p:nvGrpSpPr>
+        <p:cNvPr id="1" name=""/>
+        <p:cNvGrpSpPr/>
+        <p:nvPr/>
+      </p:nvGrpSpPr>
+      <p:grpSpPr/>
+      <p:sp>
+        <p:nvSpPr>
+          <p:cNvPr id="2" name="Title 1"/>
+          <p:cNvSpPr>
+            <a:spLocks noGrp="1"/>
+          </p:cNvSpPr>
+          <p:nvPr>
+            <p:ph type="title"/>
+          </p:nvPr>
+        </p:nvSpPr>
+        <p:spPr/>
+        <p:txBody>
+          <a:bodyPr/>
+          <a:lstStyle/>
+          <a:p>
+            <a:r>
+              <a:t>Ast Emp092 01 - EMP092</a:t>
+            </a:r>
+          </a:p>
+        </p:txBody>
+      </p:sp>
+      <p:sp>
+        <p:nvSpPr>
+          <p:cNvPr id="3" name="Content Placeholder 2"/>
+          <p:cNvSpPr>
+            <a:spLocks noGrp="1"/>
+          </p:cNvSpPr>
+          <p:nvPr>
+            <p:ph idx="1"/>
+          </p:nvPr>
+        </p:nvSpPr>
+        <p:spPr/>
+        <p:txBody>
+          <a:bodyPr/>
+          <a:lstStyle/>
+          <a:p>
+            <a:r>
+              <a:t>Slide 5: Executive Summary</a:t>
+            </a:r>
+          </a:p>
+          <a:p>
+            <a:pPr lvl="1"/>
+            <a:r>
+              <a:t>Section 1: Department KPI performance. EMP092 contributes to ast emp092 01 through recurring collaboration, clear ownership boundaries, and measurable outcomes. The team captures decisions, open issues, and handoffs so that knowledge remains discoverable for future programs.</a:t>
+            </a:r>
+          </a:p>
+          <a:p>
+            <a:pPr lvl="1"/>
+            <a:r>
+              <a:t>Section 2: Automation backlog refinement. EMP092 contributes to ast emp092 01 through recurring collaboration, clear ownership boundaries, and measurable outcomes. The team captures decisions, open issues, and handoffs so that knowledge remains discoverable for future programs.</a:t>
+            </a:r>
+          </a:p>
+          <a:p>
+            <a:pPr lvl="1"/>
+            <a:r>
+              <a:t>Section 3: Operational risk review. EMP092 contributes to ast emp092 01 through recurring collaboration, clear ownership boundaries, and measurable outcomes. The team captures decisions, open issues, and handoffs so that knowledge remains discoverable for future programs.</a:t>
             </a:r>
           </a:p>
         </p:txBody>
